--- a/presentations/road-traffic-simulation-fr.pptx
+++ b/presentations/road-traffic-simulation-fr.pptx
@@ -1,6 +1,6 @@
 
 <file path=ppt/presentation.xml><?xml version="1.0" encoding="utf-8"?>
-<p:presentation xmlns:a="http://schemas.openxmlformats.org/drawingml/2006/main" xmlns:r="http://schemas.openxmlformats.org/officeDocument/2006/relationships" xmlns:p="http://schemas.openxmlformats.org/presentationml/2006/main" saveSubsetFonts="1" autoCompressPictures="0">
+<p:presentation xmlns:a="http://schemas.openxmlformats.org/drawingml/2006/main" xmlns:r="http://schemas.openxmlformats.org/officeDocument/2006/relationships" xmlns:p="http://schemas.openxmlformats.org/presentationml/2006/main" removePersonalInfoOnSave="1" saveSubsetFonts="1" autoCompressPictures="0">
   <p:sldMasterIdLst>
     <p:sldMasterId id="2147483648" r:id="rId1"/>
   </p:sldMasterIdLst>
@@ -14209,7 +14209,7 @@
         <a:font script="Tfng" typeface="Ebrima"/>
       </a:majorFont>
       <a:minorFont>
-        <a:latin typeface="Calibri" panose="020F[phone redacted]030204"/>
+        <a:latin typeface="Calibri" panose="020F0502020204030204"/>
         <a:ea typeface=""/>
         <a:cs typeface=""/>
         <a:font script="Jpan" typeface="游ゴシック"/>
@@ -14504,7 +14504,7 @@
         <a:font script="Tfng" typeface="Ebrima"/>
       </a:majorFont>
       <a:minorFont>
-        <a:latin typeface="Calibri" panose="020F[phone redacted]030204"/>
+        <a:latin typeface="Calibri" panose="020F0502020204030204"/>
         <a:ea typeface=""/>
         <a:cs typeface=""/>
         <a:font script="Jpan" typeface="游ゴシック"/>

--- a/presentations/road-traffic-simulation-fr.pptx
+++ b/presentations/road-traffic-simulation-fr.pptx
@@ -1,6 +1,6 @@
 
 <file path=ppt/presentation.xml><?xml version="1.0" encoding="utf-8"?>
-<p:presentation xmlns:a="http://schemas.openxmlformats.org/drawingml/2006/main" xmlns:r="http://schemas.openxmlformats.org/officeDocument/2006/relationships" xmlns:p="http://schemas.openxmlformats.org/presentationml/2006/main" removePersonalInfoOnSave="1" saveSubsetFonts="1" autoCompressPictures="0">
+<p:presentation xmlns:a="http://schemas.openxmlformats.org/drawingml/2006/main" xmlns:r="http://schemas.openxmlformats.org/officeDocument/2006/relationships" xmlns:p="http://schemas.openxmlformats.org/presentationml/2006/main" saveSubsetFonts="1" autoCompressPictures="0">
   <p:sldMasterIdLst>
     <p:sldMasterId id="2147483648" r:id="rId1"/>
   </p:sldMasterIdLst>
@@ -14209,7 +14209,7 @@
         <a:font script="Tfng" typeface="Ebrima"/>
       </a:majorFont>
       <a:minorFont>
-        <a:latin typeface="Calibri" panose="020F0502020204030204"/>
+        <a:latin typeface="Calibri" panose="020F[phone redacted]030204"/>
         <a:ea typeface=""/>
         <a:cs typeface=""/>
         <a:font script="Jpan" typeface="游ゴシック"/>
@@ -14504,7 +14504,7 @@
         <a:font script="Tfng" typeface="Ebrima"/>
       </a:majorFont>
       <a:minorFont>
-        <a:latin typeface="Calibri" panose="020F0502020204030204"/>
+        <a:latin typeface="Calibri" panose="020F[phone redacted]030204"/>
         <a:ea typeface=""/>
         <a:cs typeface=""/>
         <a:font script="Jpan" typeface="游ゴシック"/>
